--- a/prezentacija.pptx
+++ b/prezentacija.pptx
@@ -4993,7 +4993,7 @@
         </p:nvSpPr>
         <p:spPr>
           <a:xfrm>
-            <a:off x="876300" y="4514850"/>
+            <a:off x="914400" y="3219611"/>
             <a:ext cx="3619500" cy="552450"/>
           </a:xfrm>
           <a:prstGeom prst="rect">
@@ -5017,7 +5017,7 @@
               </a:defRPr>
             </a:pPr>
             <a:r>
-              <a:rPr sz="3150" b="1">
+              <a:rPr sz="3150" b="1" dirty="0">
                 <a:solidFill>
                   <a:srgbClr val="102018"/>
                 </a:solidFill>
@@ -5043,7 +5043,7 @@
         </p:nvSpPr>
         <p:spPr>
           <a:xfrm>
-            <a:off x="914400" y="5143500"/>
+            <a:off x="914400" y="3698389"/>
             <a:ext cx="3429000" cy="304800"/>
           </a:xfrm>
           <a:prstGeom prst="rect">
@@ -5067,7 +5067,7 @@
               </a:defRPr>
             </a:pPr>
             <a:r>
-              <a:rPr sz="1650" b="1">
+              <a:rPr sz="1650" b="1" dirty="0">
                 <a:solidFill>
                   <a:srgbClr val="2F6F4E"/>
                 </a:solidFill>
@@ -5329,6 +5329,36 @@
           </a:p>
         </p:txBody>
       </p:sp>
+      <p:pic>
+        <p:nvPicPr>
+          <p:cNvPr id="10" name="Picture 9"/>
+          <p:cNvPicPr>
+            <a:picLocks noChangeAspect="1"/>
+          </p:cNvPicPr>
+          <p:nvPr/>
+        </p:nvPicPr>
+        <p:blipFill>
+          <a:blip r:embed="rId6">
+            <a:extLst>
+              <a:ext uri="{28A0092B-C50C-407E-A947-70E740481C1C}">
+                <a14:useLocalDpi xmlns:a14="http://schemas.microsoft.com/office/drawing/2010/main" val="0"/>
+              </a:ext>
+            </a:extLst>
+          </a:blip>
+          <a:stretch>
+            <a:fillRect/>
+          </a:stretch>
+        </p:blipFill>
+        <p:spPr>
+          <a:xfrm>
+            <a:off x="866775" y="4203375"/>
+            <a:ext cx="4931617" cy="2600307"/>
+          </a:xfrm>
+          <a:prstGeom prst="rect">
+            <a:avLst/>
+          </a:prstGeom>
+        </p:spPr>
+      </p:pic>
     </p:spTree>
     <p:extLst>
       <p:ext uri="{BB962C8B-B14F-4D97-AF65-F5344CB8AC3E}">
